--- a/public/FlowGuard-pitch.pptx
+++ b/public/FlowGuard-pitch.pptx
@@ -2623,7 +2623,7 @@
                 <a:ea typeface="Arial" pitchFamily="34" charset="-122"/>
                 <a:cs typeface="Arial" pitchFamily="34" charset="-120"/>
               </a:rPr>
-              <a:t>AI pre-send precheck</a:t>
+              <a:t>AI + amount-tier precheck</a:t>
             </a:r>
             <a:endParaRPr lang="en-US" sz="1600" dirty="0"/>
           </a:p>
@@ -2662,7 +2662,7 @@
                 <a:ea typeface="Arial" pitchFamily="34" charset="-122"/>
                 <a:cs typeface="Arial" pitchFamily="34" charset="-120"/>
               </a:rPr>
-              <a:t>DeepSeek AI + a deterministic risk engine estimate the return probability before you commit.</a:t>
+              <a:t>DeepSeek AI and a deterministic engine score return probability; amount tiers escalate scrutiny, and payouts ≥ $1M are forced into the high-risk lane.</a:t>
             </a:r>
             <a:endParaRPr lang="en-US" sz="1300" dirty="0"/>
           </a:p>
@@ -2767,7 +2767,7 @@
                 <a:ea typeface="Arial" pitchFamily="34" charset="-122"/>
                 <a:cs typeface="Arial" pitchFamily="34" charset="-120"/>
               </a:rPr>
-              <a:t>Dual-route recommendation</a:t>
+              <a:t>Verify-first with the supplier</a:t>
             </a:r>
             <a:endParaRPr lang="en-US" sz="1600" dirty="0"/>
           </a:p>
@@ -2806,7 +2806,7 @@
                 <a:ea typeface="Arial" pitchFamily="34" charset="-122"/>
                 <a:cs typeface="Arial" pitchFamily="34" charset="-120"/>
               </a:rPr>
-              <a:t>Stablecoin Direct vs Local Fiat Payout, auto-ranked by risk and cost.</a:t>
+              <a:t>Data-quality problems (name / IBAN / SWIFT / account) must be synced to the payee as a Case first — approval is gated until verified or explicitly overridden.</a:t>
             </a:r>
             <a:endParaRPr lang="en-US" sz="1300" dirty="0"/>
           </a:p>
@@ -2911,7 +2911,7 @@
                 <a:ea typeface="Arial" pitchFamily="34" charset="-122"/>
                 <a:cs typeface="Arial" pitchFamily="34" charset="-120"/>
               </a:rPr>
-              <a:t>Maker-checker control</a:t>
+              <a:t>Maker-checker, enforced</a:t>
             </a:r>
             <a:endParaRPr lang="en-US" sz="1600" dirty="0"/>
           </a:p>
@@ -2950,7 +2950,7 @@
                 <a:ea typeface="Arial" pitchFamily="34" charset="-122"/>
                 <a:cs typeface="Arial" pitchFamily="34" charset="-120"/>
               </a:rPr>
-              <a:t>Cashier drafts, supervisor approves. Duties are split by design.</a:t>
+              <a:t>Submit as Maker, approve as Checker. Self-approval is hard-blocked front-end and server-side — real segregation of duties.</a:t>
             </a:r>
             <a:endParaRPr lang="en-US" sz="1300" dirty="0"/>
           </a:p>
@@ -3055,7 +3055,7 @@
                 <a:ea typeface="Arial" pitchFamily="34" charset="-122"/>
                 <a:cs typeface="Arial" pitchFamily="34" charset="-120"/>
               </a:rPr>
-              <a:t>Escrow + shared case board</a:t>
+              <a:t>Dual-route + dual currency</a:t>
             </a:r>
             <a:endParaRPr lang="en-US" sz="1600" dirty="0"/>
           </a:p>
@@ -3094,7 +3094,7 @@
                 <a:ea typeface="Arial" pitchFamily="34" charset="-122"/>
                 <a:cs typeface="Arial" pitchFamily="34" charset="-120"/>
               </a:rPr>
-              <a:t>Milestone escrow and login-free token links let clients and suppliers confirm data fixes online.</a:t>
+              <a:t>Stablecoin Direct vs Local Fiat auto-ranked by risk and cost; each payout shows settlement currency → payee's local currency.</a:t>
             </a:r>
             <a:endParaRPr lang="en-US" sz="1300" dirty="0"/>
           </a:p>
@@ -3329,7 +3329,7 @@
                 <a:ea typeface="Arial" pitchFamily="34" charset="-122"/>
                 <a:cs typeface="Arial" pitchFamily="34" charset="-120"/>
               </a:rPr>
-              <a:t>End-to-end flow</a:t>
+              <a:t>Full control loop</a:t>
             </a:r>
             <a:endParaRPr lang="en-US" sz="1600" dirty="0"/>
           </a:p>
@@ -3368,7 +3368,7 @@
                 <a:ea typeface="Arial" pitchFamily="34" charset="-122"/>
                 <a:cs typeface="Arial" pitchFamily="34" charset="-120"/>
               </a:rPr>
-              <a:t>Draft to AI precheck to dual-route to dual review to escrow to reconciliation, fully wired.</a:t>
+              <a:t>Precheck → verify-with-supplier → dual approve → execute (MT103 / wallet) → payee arrival receipt → auto-reconcile, fully wired.</a:t>
             </a:r>
             <a:endParaRPr lang="en-US" sz="1300" dirty="0"/>
           </a:p>
@@ -3473,7 +3473,7 @@
                 <a:ea typeface="Arial" pitchFamily="34" charset="-122"/>
                 <a:cs typeface="Arial" pitchFamily="34" charset="-120"/>
               </a:rPr>
-              <a:t>Real backend</a:t>
+              <a:t>Verified risk clears itself</a:t>
             </a:r>
             <a:endParaRPr lang="en-US" sz="1600" dirty="0"/>
           </a:p>
@@ -3512,7 +3512,7 @@
                 <a:ea typeface="Arial" pitchFamily="34" charset="-122"/>
                 <a:cs typeface="Arial" pitchFamily="34" charset="-120"/>
               </a:rPr>
-              <a:t>PostgreSQL with multi-tenant isolation, auth guards, and an audit timeline on every case.</a:t>
+              <a:t>When a supplier confirms a flagged detail, the case resolves and the risk score / blocker recompute automatically — no manual fudging.</a:t>
             </a:r>
             <a:endParaRPr lang="en-US" sz="1300" dirty="0"/>
           </a:p>
@@ -3617,7 +3617,7 @@
                 <a:ea typeface="Arial" pitchFamily="34" charset="-122"/>
                 <a:cs typeface="Arial" pitchFamily="34" charset="-120"/>
               </a:rPr>
-              <a:t>Mobile-first, two modes</a:t>
+              <a:t>Real backend</a:t>
             </a:r>
             <a:endParaRPr lang="en-US" sz="1600" dirty="0"/>
           </a:p>
@@ -3656,7 +3656,7 @@
                 <a:ea typeface="Arial" pitchFamily="34" charset="-122"/>
                 <a:cs typeface="Arial" pitchFamily="34" charset="-120"/>
               </a:rPr>
-              <a:t>Authenticated and guest mode — guests run locally for zero-friction trials.</a:t>
+              <a:t>PostgreSQL with multi-tenant isolation, auth guards, a server-enforced state machine, and an audit trail on every payment and case.</a:t>
             </a:r>
             <a:endParaRPr lang="en-US" sz="1300" dirty="0"/>
           </a:p>
@@ -3761,7 +3761,7 @@
                 <a:ea typeface="Arial" pitchFamily="34" charset="-122"/>
                 <a:cs typeface="Arial" pitchFamily="34" charset="-120"/>
               </a:rPr>
-              <a:t>Quality-checked</a:t>
+              <a:t>Login-free proof of arrival</a:t>
             </a:r>
             <a:endParaRPr lang="en-US" sz="1600" dirty="0"/>
           </a:p>
@@ -3800,7 +3800,7 @@
                 <a:ea typeface="Arial" pitchFamily="34" charset="-122"/>
                 <a:cs typeface="Arial" pitchFamily="34" charset="-120"/>
               </a:rPr>
-              <a:t>Passed UI, engineering, database, and full-flow audits — ready for a live demo.</a:t>
+              <a:t>The payee confirms receipt via an unguessable token link; it's stored as real settlement evidence and auto-matched in reconciliation.</a:t>
             </a:r>
             <a:endParaRPr lang="en-US" sz="1300" dirty="0"/>
           </a:p>
@@ -4074,7 +4074,7 @@
                 <a:ea typeface="Arial" pitchFamily="34" charset="-122"/>
                 <a:cs typeface="Arial" pitchFamily="34" charset="-120"/>
               </a:rPr>
-              <a:t>Competitors reconcile after failure. We block the failure first.</a:t>
+              <a:t>Competitors reconcile after failure. We block it first — and clear it by verifying with the supplier.</a:t>
             </a:r>
             <a:endParaRPr lang="en-US" sz="1300" dirty="0"/>
           </a:p>
@@ -4218,7 +4218,7 @@
                 <a:ea typeface="Arial" pitchFamily="34" charset="-122"/>
                 <a:cs typeface="Arial" pitchFamily="34" charset="-120"/>
               </a:rPr>
-              <a:t>Stablecoin and local fiat compared in the same flow.</a:t>
+              <a:t>Stablecoin and local fiat compared in the same flow, with dual settlement / payee currency.</a:t>
             </a:r>
             <a:endParaRPr lang="en-US" sz="1300" dirty="0"/>
           </a:p>
@@ -4362,7 +4362,7 @@
                 <a:ea typeface="Arial" pitchFamily="34" charset="-122"/>
                 <a:cs typeface="Arial" pitchFamily="34" charset="-120"/>
               </a:rPr>
-              <a:t>Maker-checker and audit trail are core, not a bolt-on.</a:t>
+              <a:t>Amount-tier lanes, enforced maker-checker, and a full audit trail are core — not a bolt-on.</a:t>
             </a:r>
             <a:endParaRPr lang="en-US" sz="1300" dirty="0"/>
           </a:p>

--- a/public/FlowGuard-pitch.pptx
+++ b/public/FlowGuard-pitch.pptx
@@ -1547,11 +1547,11 @@
                 <a:solidFill>
                   <a:srgbClr val="E0783C"/>
                 </a:solidFill>
-                <a:latin typeface="Arial" pitchFamily="34" charset="0"/>
-                <a:ea typeface="Arial" pitchFamily="34" charset="-122"/>
-                <a:cs typeface="Arial" pitchFamily="34" charset="-120"/>
-              </a:rPr>
-              <a:t>CROSS-BORDER PAYOUT CONSOLE</a:t>
+                <a:latin typeface="Microsoft YaHei" pitchFamily="34" charset="0"/>
+                <a:ea typeface="Microsoft YaHei" pitchFamily="34" charset="-122"/>
+                <a:cs typeface="Microsoft YaHei" pitchFamily="34" charset="-120"/>
+              </a:rPr>
+              <a:t>跨境付款风控控制台</a:t>
             </a:r>
             <a:endParaRPr lang="en-US" sz="1200" dirty="0"/>
           </a:p>
@@ -1586,9 +1586,9 @@
                 <a:solidFill>
                   <a:srgbClr val="EDEBE5"/>
                 </a:solidFill>
-                <a:latin typeface="Arial" pitchFamily="34" charset="0"/>
-                <a:ea typeface="Arial" pitchFamily="34" charset="-122"/>
-                <a:cs typeface="Arial" pitchFamily="34" charset="-120"/>
+                <a:latin typeface="Microsoft YaHei" pitchFamily="34" charset="0"/>
+                <a:ea typeface="Microsoft YaHei" pitchFamily="34" charset="-122"/>
+                <a:cs typeface="Microsoft YaHei" pitchFamily="34" charset="-120"/>
               </a:rPr>
               <a:t>Flow</a:t>
             </a:r>
@@ -1600,9 +1600,9 @@
                 <a:solidFill>
                   <a:srgbClr val="E0783C"/>
                 </a:solidFill>
-                <a:latin typeface="Arial" pitchFamily="34" charset="0"/>
-                <a:ea typeface="Arial" pitchFamily="34" charset="-122"/>
-                <a:cs typeface="Arial" pitchFamily="34" charset="-120"/>
+                <a:latin typeface="Microsoft YaHei" pitchFamily="34" charset="0"/>
+                <a:ea typeface="Microsoft YaHei" pitchFamily="34" charset="-122"/>
+                <a:cs typeface="Microsoft YaHei" pitchFamily="34" charset="-120"/>
               </a:rPr>
               <a:t>Guard</a:t>
             </a:r>
@@ -1618,8 +1618,8 @@
         </p:nvSpPr>
         <p:spPr>
           <a:xfrm>
-            <a:off x="1828800" y="3840480"/>
-            <a:ext cx="8531352" cy="914400"/>
+            <a:off x="1371600" y="3840480"/>
+            <a:ext cx="9445752" cy="914400"/>
           </a:xfrm>
           <a:prstGeom prst="rect">
             <a:avLst/>
@@ -1639,11 +1639,11 @@
                 <a:solidFill>
                   <a:srgbClr val="9A9E97"/>
                 </a:solidFill>
-                <a:latin typeface="Arial" pitchFamily="34" charset="0"/>
-                <a:ea typeface="Arial" pitchFamily="34" charset="-122"/>
-                <a:cs typeface="Arial" pitchFamily="34" charset="-120"/>
-              </a:rPr>
-              <a:t>Dual-route, risk-first cross-border payments — check before you send.</a:t>
+                <a:latin typeface="Microsoft YaHei" pitchFamily="34" charset="0"/>
+                <a:ea typeface="Microsoft YaHei" pitchFamily="34" charset="-122"/>
+                <a:cs typeface="Microsoft YaHei" pitchFamily="34" charset="-120"/>
+              </a:rPr>
+              <a:t>双通道、风险优先的跨境付款 —— 先核查,再付款。</a:t>
             </a:r>
             <a:endParaRPr lang="en-US" sz="2000" dirty="0"/>
           </a:p>
@@ -1678,11 +1678,11 @@
                 <a:solidFill>
                   <a:srgbClr val="9A9E97"/>
                 </a:solidFill>
-                <a:latin typeface="Arial" pitchFamily="34" charset="0"/>
-                <a:ea typeface="Arial" pitchFamily="34" charset="-122"/>
-                <a:cs typeface="Arial" pitchFamily="34" charset="-120"/>
-              </a:rPr>
-              <a:t>INVESTOR PITCH · 2026</a:t>
+                <a:latin typeface="Microsoft YaHei" pitchFamily="34" charset="0"/>
+                <a:ea typeface="Microsoft YaHei" pitchFamily="34" charset="-122"/>
+                <a:cs typeface="Microsoft YaHei" pitchFamily="34" charset="-120"/>
+              </a:rPr>
+              <a:t>投资路演 · 2026</a:t>
             </a:r>
             <a:endParaRPr lang="en-US" sz="1200" dirty="0"/>
           </a:p>
@@ -1769,11 +1769,11 @@
                 <a:solidFill>
                   <a:srgbClr val="E0783C"/>
                 </a:solidFill>
-                <a:latin typeface="Arial" pitchFamily="34" charset="0"/>
-                <a:ea typeface="Arial" pitchFamily="34" charset="-122"/>
-                <a:cs typeface="Arial" pitchFamily="34" charset="-120"/>
-              </a:rPr>
-              <a:t>THE PROBLEM</a:t>
+                <a:latin typeface="Microsoft YaHei" pitchFamily="34" charset="0"/>
+                <a:ea typeface="Microsoft YaHei" pitchFamily="34" charset="-122"/>
+                <a:cs typeface="Microsoft YaHei" pitchFamily="34" charset="-120"/>
+              </a:rPr>
+              <a:t>痛点</a:t>
             </a:r>
             <a:endParaRPr lang="en-US" sz="1200" dirty="0"/>
           </a:p>
@@ -1808,11 +1808,11 @@
                 <a:solidFill>
                   <a:srgbClr val="EDEBE5"/>
                 </a:solidFill>
-                <a:latin typeface="Arial" pitchFamily="34" charset="0"/>
-                <a:ea typeface="Arial" pitchFamily="34" charset="-122"/>
-                <a:cs typeface="Arial" pitchFamily="34" charset="-120"/>
-              </a:rPr>
-              <a:t>Cross-border B2B payouts are sent blind</a:t>
+                <a:latin typeface="Microsoft YaHei" pitchFamily="34" charset="0"/>
+                <a:ea typeface="Microsoft YaHei" pitchFamily="34" charset="-122"/>
+                <a:cs typeface="Microsoft YaHei" pitchFamily="34" charset="-120"/>
+              </a:rPr>
+              <a:t>跨境 B2B 付款都是「盲发」</a:t>
             </a:r>
             <a:endParaRPr lang="en-US" sz="3000" dirty="0"/>
           </a:p>
@@ -1874,9 +1874,9 @@
                 <a:solidFill>
                   <a:srgbClr val="E0783C"/>
                 </a:solidFill>
-                <a:latin typeface="Arial" pitchFamily="34" charset="0"/>
-                <a:ea typeface="Arial" pitchFamily="34" charset="-122"/>
-                <a:cs typeface="Arial" pitchFamily="34" charset="-120"/>
+                <a:latin typeface="Microsoft YaHei" pitchFamily="34" charset="0"/>
+                <a:ea typeface="Microsoft YaHei" pitchFamily="34" charset="-122"/>
+                <a:cs typeface="Microsoft YaHei" pitchFamily="34" charset="-120"/>
               </a:rPr>
               <a:t>01</a:t>
             </a:r>
@@ -1913,11 +1913,11 @@
                 <a:solidFill>
                   <a:srgbClr val="EDEBE5"/>
                 </a:solidFill>
-                <a:latin typeface="Arial" pitchFamily="34" charset="0"/>
-                <a:ea typeface="Arial" pitchFamily="34" charset="-122"/>
-                <a:cs typeface="Arial" pitchFamily="34" charset="-120"/>
-              </a:rPr>
-              <a:t>Send-and-pray wires</a:t>
+                <a:latin typeface="Microsoft YaHei" pitchFamily="34" charset="0"/>
+                <a:ea typeface="Microsoft YaHei" pitchFamily="34" charset="-122"/>
+                <a:cs typeface="Microsoft YaHei" pitchFamily="34" charset="-120"/>
+              </a:rPr>
+              <a:t>先发后祈祷</a:t>
             </a:r>
             <a:endParaRPr lang="en-US" sz="1600" dirty="0"/>
           </a:p>
@@ -1952,11 +1952,11 @@
                 <a:solidFill>
                   <a:srgbClr val="9A9E97"/>
                 </a:solidFill>
-                <a:latin typeface="Arial" pitchFamily="34" charset="0"/>
-                <a:ea typeface="Arial" pitchFamily="34" charset="-122"/>
-                <a:cs typeface="Arial" pitchFamily="34" charset="-120"/>
-              </a:rPr>
-              <a:t>You only learn a payment will bounce after it leaves — funds frozen for days while returns settle.</a:t>
+                <a:latin typeface="Microsoft YaHei" pitchFamily="34" charset="0"/>
+                <a:ea typeface="Microsoft YaHei" pitchFamily="34" charset="-122"/>
+                <a:cs typeface="Microsoft YaHei" pitchFamily="34" charset="-120"/>
+              </a:rPr>
+              <a:t>钱打出去才知道会被退回 —— 资金冻结数日,等退汇结算,业务停摆。</a:t>
             </a:r>
             <a:endParaRPr lang="en-US" sz="1300" dirty="0"/>
           </a:p>
@@ -2018,9 +2018,9 @@
                 <a:solidFill>
                   <a:srgbClr val="E0783C"/>
                 </a:solidFill>
-                <a:latin typeface="Arial" pitchFamily="34" charset="0"/>
-                <a:ea typeface="Arial" pitchFamily="34" charset="-122"/>
-                <a:cs typeface="Arial" pitchFamily="34" charset="-120"/>
+                <a:latin typeface="Microsoft YaHei" pitchFamily="34" charset="0"/>
+                <a:ea typeface="Microsoft YaHei" pitchFamily="34" charset="-122"/>
+                <a:cs typeface="Microsoft YaHei" pitchFamily="34" charset="-120"/>
               </a:rPr>
               <a:t>02</a:t>
             </a:r>
@@ -2057,11 +2057,11 @@
                 <a:solidFill>
                   <a:srgbClr val="EDEBE5"/>
                 </a:solidFill>
-                <a:latin typeface="Arial" pitchFamily="34" charset="0"/>
-                <a:ea typeface="Arial" pitchFamily="34" charset="-122"/>
-                <a:cs typeface="Arial" pitchFamily="34" charset="-120"/>
-              </a:rPr>
-              <a:t>Dirty beneficiary data</a:t>
+                <a:latin typeface="Microsoft YaHei" pitchFamily="34" charset="0"/>
+                <a:ea typeface="Microsoft YaHei" pitchFamily="34" charset="-122"/>
+                <a:cs typeface="Microsoft YaHei" pitchFamily="34" charset="-120"/>
+              </a:rPr>
+              <a:t>收款人信息脏数据</a:t>
             </a:r>
             <a:endParaRPr lang="en-US" sz="1600" dirty="0"/>
           </a:p>
@@ -2096,11 +2096,11 @@
                 <a:solidFill>
                   <a:srgbClr val="9A9E97"/>
                 </a:solidFill>
-                <a:latin typeface="Arial" pitchFamily="34" charset="0"/>
-                <a:ea typeface="Arial" pitchFamily="34" charset="-122"/>
-                <a:cs typeface="Arial" pitchFamily="34" charset="-120"/>
-              </a:rPr>
-              <a:t>Wrong company name, bad IBAN, dormant accounts. Banks silently return the wire; reconciliation is manual.</a:t>
+                <a:latin typeface="Microsoft YaHei" pitchFamily="34" charset="0"/>
+                <a:ea typeface="Microsoft YaHei" pitchFamily="34" charset="-122"/>
+                <a:cs typeface="Microsoft YaHei" pitchFamily="34" charset="-120"/>
+              </a:rPr>
+              <a:t>公司名不符、IBAN 错误、账户休眠。银行静默退汇,对账全靠人工。</a:t>
             </a:r>
             <a:endParaRPr lang="en-US" sz="1300" dirty="0"/>
           </a:p>
@@ -2162,9 +2162,9 @@
                 <a:solidFill>
                   <a:srgbClr val="E0783C"/>
                 </a:solidFill>
-                <a:latin typeface="Arial" pitchFamily="34" charset="0"/>
-                <a:ea typeface="Arial" pitchFamily="34" charset="-122"/>
-                <a:cs typeface="Arial" pitchFamily="34" charset="-120"/>
+                <a:latin typeface="Microsoft YaHei" pitchFamily="34" charset="0"/>
+                <a:ea typeface="Microsoft YaHei" pitchFamily="34" charset="-122"/>
+                <a:cs typeface="Microsoft YaHei" pitchFamily="34" charset="-120"/>
               </a:rPr>
               <a:t>03</a:t>
             </a:r>
@@ -2201,11 +2201,11 @@
                 <a:solidFill>
                   <a:srgbClr val="EDEBE5"/>
                 </a:solidFill>
-                <a:latin typeface="Arial" pitchFamily="34" charset="0"/>
-                <a:ea typeface="Arial" pitchFamily="34" charset="-122"/>
-                <a:cs typeface="Arial" pitchFamily="34" charset="-120"/>
-              </a:rPr>
-              <a:t>No dual control</a:t>
+                <a:latin typeface="Microsoft YaHei" pitchFamily="34" charset="0"/>
+                <a:ea typeface="Microsoft YaHei" pitchFamily="34" charset="-122"/>
+                <a:cs typeface="Microsoft YaHei" pitchFamily="34" charset="-120"/>
+              </a:rPr>
+              <a:t>缺少双人复核</a:t>
             </a:r>
             <a:endParaRPr lang="en-US" sz="1600" dirty="0"/>
           </a:p>
@@ -2240,11 +2240,11 @@
                 <a:solidFill>
                   <a:srgbClr val="9A9E97"/>
                 </a:solidFill>
-                <a:latin typeface="Arial" pitchFamily="34" charset="0"/>
-                <a:ea typeface="Arial" pitchFamily="34" charset="-122"/>
-                <a:cs typeface="Arial" pitchFamily="34" charset="-120"/>
-              </a:rPr>
-              <a:t>A single cashier can push a large payout alone — real compliance and fraud exposure.</a:t>
+                <a:latin typeface="Microsoft YaHei" pitchFamily="34" charset="0"/>
+                <a:ea typeface="Microsoft YaHei" pitchFamily="34" charset="-122"/>
+                <a:cs typeface="Microsoft YaHei" pitchFamily="34" charset="-120"/>
+              </a:rPr>
+              <a:t>一名出纳就能单独推送大额付款 —— 真实的合规与欺诈敞口。</a:t>
             </a:r>
             <a:endParaRPr lang="en-US" sz="1300" dirty="0"/>
           </a:p>
@@ -2306,9 +2306,9 @@
                 <a:solidFill>
                   <a:srgbClr val="E0783C"/>
                 </a:solidFill>
-                <a:latin typeface="Arial" pitchFamily="34" charset="0"/>
-                <a:ea typeface="Arial" pitchFamily="34" charset="-122"/>
-                <a:cs typeface="Arial" pitchFamily="34" charset="-120"/>
+                <a:latin typeface="Microsoft YaHei" pitchFamily="34" charset="0"/>
+                <a:ea typeface="Microsoft YaHei" pitchFamily="34" charset="-122"/>
+                <a:cs typeface="Microsoft YaHei" pitchFamily="34" charset="-120"/>
               </a:rPr>
               <a:t>04</a:t>
             </a:r>
@@ -2345,11 +2345,11 @@
                 <a:solidFill>
                   <a:srgbClr val="EDEBE5"/>
                 </a:solidFill>
-                <a:latin typeface="Arial" pitchFamily="34" charset="0"/>
-                <a:ea typeface="Arial" pitchFamily="34" charset="-122"/>
-                <a:cs typeface="Arial" pitchFamily="34" charset="-120"/>
-              </a:rPr>
-              <a:t>Wrong rail = wasted money</a:t>
+                <a:latin typeface="Microsoft YaHei" pitchFamily="34" charset="0"/>
+                <a:ea typeface="Microsoft YaHei" pitchFamily="34" charset="-122"/>
+                <a:cs typeface="Microsoft YaHei" pitchFamily="34" charset="-120"/>
+              </a:rPr>
+              <a:t>选错通道 = 白花钱</a:t>
             </a:r>
             <a:endParaRPr lang="en-US" sz="1600" dirty="0"/>
           </a:p>
@@ -2384,11 +2384,11 @@
                 <a:solidFill>
                   <a:srgbClr val="9A9E97"/>
                 </a:solidFill>
-                <a:latin typeface="Arial" pitchFamily="34" charset="0"/>
-                <a:ea typeface="Arial" pitchFamily="34" charset="-122"/>
-                <a:cs typeface="Arial" pitchFamily="34" charset="-120"/>
-              </a:rPr>
-              <a:t>Stablecoin direct vs local fiat payout picked by gut feel means higher fees and higher failure rates.</a:t>
+                <a:latin typeface="Microsoft YaHei" pitchFamily="34" charset="0"/>
+                <a:ea typeface="Microsoft YaHei" pitchFamily="34" charset="-122"/>
+                <a:cs typeface="Microsoft YaHei" pitchFamily="34" charset="-120"/>
+              </a:rPr>
+              <a:t>稳定币直付与本地法币凭感觉二选一,费用更高、失败率更高。</a:t>
             </a:r>
             <a:endParaRPr lang="en-US" sz="1300" dirty="0"/>
           </a:p>
@@ -2475,11 +2475,11 @@
                 <a:solidFill>
                   <a:srgbClr val="E0783C"/>
                 </a:solidFill>
-                <a:latin typeface="Arial" pitchFamily="34" charset="0"/>
-                <a:ea typeface="Arial" pitchFamily="34" charset="-122"/>
-                <a:cs typeface="Arial" pitchFamily="34" charset="-120"/>
-              </a:rPr>
-              <a:t>THE SOLUTION</a:t>
+                <a:latin typeface="Microsoft YaHei" pitchFamily="34" charset="0"/>
+                <a:ea typeface="Microsoft YaHei" pitchFamily="34" charset="-122"/>
+                <a:cs typeface="Microsoft YaHei" pitchFamily="34" charset="-120"/>
+              </a:rPr>
+              <a:t>解决方案</a:t>
             </a:r>
             <a:endParaRPr lang="en-US" sz="1200" dirty="0"/>
           </a:p>
@@ -2514,11 +2514,11 @@
                 <a:solidFill>
                   <a:srgbClr val="EDEBE5"/>
                 </a:solidFill>
-                <a:latin typeface="Arial" pitchFamily="34" charset="0"/>
-                <a:ea typeface="Arial" pitchFamily="34" charset="-122"/>
-                <a:cs typeface="Arial" pitchFamily="34" charset="-120"/>
-              </a:rPr>
-              <a:t>One console that de-risks the payout before it leaves</a:t>
+                <a:latin typeface="Microsoft YaHei" pitchFamily="34" charset="0"/>
+                <a:ea typeface="Microsoft YaHei" pitchFamily="34" charset="-122"/>
+                <a:cs typeface="Microsoft YaHei" pitchFamily="34" charset="-120"/>
+              </a:rPr>
+              <a:t>一个控制台,在付款离账前先降风险</a:t>
             </a:r>
             <a:endParaRPr lang="en-US" sz="3000" dirty="0"/>
           </a:p>
@@ -2580,9 +2580,9 @@
                 <a:solidFill>
                   <a:srgbClr val="E0783C"/>
                 </a:solidFill>
-                <a:latin typeface="Arial" pitchFamily="34" charset="0"/>
-                <a:ea typeface="Arial" pitchFamily="34" charset="-122"/>
-                <a:cs typeface="Arial" pitchFamily="34" charset="-120"/>
+                <a:latin typeface="Microsoft YaHei" pitchFamily="34" charset="0"/>
+                <a:ea typeface="Microsoft YaHei" pitchFamily="34" charset="-122"/>
+                <a:cs typeface="Microsoft YaHei" pitchFamily="34" charset="-120"/>
               </a:rPr>
               <a:t>01</a:t>
             </a:r>
@@ -2619,11 +2619,11 @@
                 <a:solidFill>
                   <a:srgbClr val="EDEBE5"/>
                 </a:solidFill>
-                <a:latin typeface="Arial" pitchFamily="34" charset="0"/>
-                <a:ea typeface="Arial" pitchFamily="34" charset="-122"/>
-                <a:cs typeface="Arial" pitchFamily="34" charset="-120"/>
-              </a:rPr>
-              <a:t>AI + amount-tier precheck</a:t>
+                <a:latin typeface="Microsoft YaHei" pitchFamily="34" charset="0"/>
+                <a:ea typeface="Microsoft YaHei" pitchFamily="34" charset="-122"/>
+                <a:cs typeface="Microsoft YaHei" pitchFamily="34" charset="-120"/>
+              </a:rPr>
+              <a:t>AI + 金额分档预检</a:t>
             </a:r>
             <a:endParaRPr lang="en-US" sz="1600" dirty="0"/>
           </a:p>
@@ -2658,11 +2658,11 @@
                 <a:solidFill>
                   <a:srgbClr val="9A9E97"/>
                 </a:solidFill>
-                <a:latin typeface="Arial" pitchFamily="34" charset="0"/>
-                <a:ea typeface="Arial" pitchFamily="34" charset="-122"/>
-                <a:cs typeface="Arial" pitchFamily="34" charset="-120"/>
-              </a:rPr>
-              <a:t>DeepSeek AI and a deterministic engine score return probability; amount tiers escalate scrutiny, and payouts ≥ $1M are forced into the high-risk lane.</a:t>
+                <a:latin typeface="Microsoft YaHei" pitchFamily="34" charset="0"/>
+                <a:ea typeface="Microsoft YaHei" pitchFamily="34" charset="-122"/>
+                <a:cs typeface="Microsoft YaHei" pitchFamily="34" charset="-120"/>
+              </a:rPr>
+              <a:t>DeepSeek AI 与确定性引擎评估退回概率;金额分档升级审查,≥ 100 万美元强制进入高风险车道。</a:t>
             </a:r>
             <a:endParaRPr lang="en-US" sz="1300" dirty="0"/>
           </a:p>
@@ -2724,9 +2724,9 @@
                 <a:solidFill>
                   <a:srgbClr val="E0783C"/>
                 </a:solidFill>
-                <a:latin typeface="Arial" pitchFamily="34" charset="0"/>
-                <a:ea typeface="Arial" pitchFamily="34" charset="-122"/>
-                <a:cs typeface="Arial" pitchFamily="34" charset="-120"/>
+                <a:latin typeface="Microsoft YaHei" pitchFamily="34" charset="0"/>
+                <a:ea typeface="Microsoft YaHei" pitchFamily="34" charset="-122"/>
+                <a:cs typeface="Microsoft YaHei" pitchFamily="34" charset="-120"/>
               </a:rPr>
               <a:t>02</a:t>
             </a:r>
@@ -2763,11 +2763,11 @@
                 <a:solidFill>
                   <a:srgbClr val="EDEBE5"/>
                 </a:solidFill>
-                <a:latin typeface="Arial" pitchFamily="34" charset="0"/>
-                <a:ea typeface="Arial" pitchFamily="34" charset="-122"/>
-                <a:cs typeface="Arial" pitchFamily="34" charset="-120"/>
-              </a:rPr>
-              <a:t>Verify-first with the supplier</a:t>
+                <a:latin typeface="Microsoft YaHei" pitchFamily="34" charset="0"/>
+                <a:ea typeface="Microsoft YaHei" pitchFamily="34" charset="-122"/>
+                <a:cs typeface="Microsoft YaHei" pitchFamily="34" charset="-120"/>
+              </a:rPr>
+              <a:t>先向供应商核查</a:t>
             </a:r>
             <a:endParaRPr lang="en-US" sz="1600" dirty="0"/>
           </a:p>
@@ -2802,11 +2802,11 @@
                 <a:solidFill>
                   <a:srgbClr val="9A9E97"/>
                 </a:solidFill>
-                <a:latin typeface="Arial" pitchFamily="34" charset="0"/>
-                <a:ea typeface="Arial" pitchFamily="34" charset="-122"/>
-                <a:cs typeface="Arial" pitchFamily="34" charset="-120"/>
-              </a:rPr>
-              <a:t>Data-quality problems (name / IBAN / SWIFT / account) must be synced to the payee as a Case first — approval is gated until verified or explicitly overridden.</a:t>
+                <a:latin typeface="Microsoft YaHei" pitchFamily="34" charset="0"/>
+                <a:ea typeface="Microsoft YaHei" pitchFamily="34" charset="-122"/>
+                <a:cs typeface="Microsoft YaHei" pitchFamily="34" charset="-120"/>
+              </a:rPr>
+              <a:t>数据质量问题(公司名 / IBAN / SWIFT / 账户)必须先作为 Case 同步给收款人 —— 未核实或未显式豁免前,审批被拦截。</a:t>
             </a:r>
             <a:endParaRPr lang="en-US" sz="1300" dirty="0"/>
           </a:p>
@@ -2868,9 +2868,9 @@
                 <a:solidFill>
                   <a:srgbClr val="E0783C"/>
                 </a:solidFill>
-                <a:latin typeface="Arial" pitchFamily="34" charset="0"/>
-                <a:ea typeface="Arial" pitchFamily="34" charset="-122"/>
-                <a:cs typeface="Arial" pitchFamily="34" charset="-120"/>
+                <a:latin typeface="Microsoft YaHei" pitchFamily="34" charset="0"/>
+                <a:ea typeface="Microsoft YaHei" pitchFamily="34" charset="-122"/>
+                <a:cs typeface="Microsoft YaHei" pitchFamily="34" charset="-120"/>
               </a:rPr>
               <a:t>03</a:t>
             </a:r>
@@ -2907,11 +2907,11 @@
                 <a:solidFill>
                   <a:srgbClr val="EDEBE5"/>
                 </a:solidFill>
-                <a:latin typeface="Arial" pitchFamily="34" charset="0"/>
-                <a:ea typeface="Arial" pitchFamily="34" charset="-122"/>
-                <a:cs typeface="Arial" pitchFamily="34" charset="-120"/>
-              </a:rPr>
-              <a:t>Maker-checker, enforced</a:t>
+                <a:latin typeface="Microsoft YaHei" pitchFamily="34" charset="0"/>
+                <a:ea typeface="Microsoft YaHei" pitchFamily="34" charset="-122"/>
+                <a:cs typeface="Microsoft YaHei" pitchFamily="34" charset="-120"/>
+              </a:rPr>
+              <a:t>强制经办—审批分离</a:t>
             </a:r>
             <a:endParaRPr lang="en-US" sz="1600" dirty="0"/>
           </a:p>
@@ -2946,11 +2946,11 @@
                 <a:solidFill>
                   <a:srgbClr val="9A9E97"/>
                 </a:solidFill>
-                <a:latin typeface="Arial" pitchFamily="34" charset="0"/>
-                <a:ea typeface="Arial" pitchFamily="34" charset="-122"/>
-                <a:cs typeface="Arial" pitchFamily="34" charset="-120"/>
-              </a:rPr>
-              <a:t>Submit as Maker, approve as Checker. Self-approval is hard-blocked front-end and server-side — real segregation of duties.</a:t>
+                <a:latin typeface="Microsoft YaHei" pitchFamily="34" charset="0"/>
+                <a:ea typeface="Microsoft YaHei" pitchFamily="34" charset="-122"/>
+                <a:cs typeface="Microsoft YaHei" pitchFamily="34" charset="-120"/>
+              </a:rPr>
+              <a:t>以「经办」提交,以「审批」批准。自审在前端与服务端双重硬拦截 —— 真正的职责分离。</a:t>
             </a:r>
             <a:endParaRPr lang="en-US" sz="1300" dirty="0"/>
           </a:p>
@@ -3012,9 +3012,9 @@
                 <a:solidFill>
                   <a:srgbClr val="E0783C"/>
                 </a:solidFill>
-                <a:latin typeface="Arial" pitchFamily="34" charset="0"/>
-                <a:ea typeface="Arial" pitchFamily="34" charset="-122"/>
-                <a:cs typeface="Arial" pitchFamily="34" charset="-120"/>
+                <a:latin typeface="Microsoft YaHei" pitchFamily="34" charset="0"/>
+                <a:ea typeface="Microsoft YaHei" pitchFamily="34" charset="-122"/>
+                <a:cs typeface="Microsoft YaHei" pitchFamily="34" charset="-120"/>
               </a:rPr>
               <a:t>04</a:t>
             </a:r>
@@ -3051,11 +3051,11 @@
                 <a:solidFill>
                   <a:srgbClr val="EDEBE5"/>
                 </a:solidFill>
-                <a:latin typeface="Arial" pitchFamily="34" charset="0"/>
-                <a:ea typeface="Arial" pitchFamily="34" charset="-122"/>
-                <a:cs typeface="Arial" pitchFamily="34" charset="-120"/>
-              </a:rPr>
-              <a:t>Dual-route + dual currency</a:t>
+                <a:latin typeface="Microsoft YaHei" pitchFamily="34" charset="0"/>
+                <a:ea typeface="Microsoft YaHei" pitchFamily="34" charset="-122"/>
+                <a:cs typeface="Microsoft YaHei" pitchFamily="34" charset="-120"/>
+              </a:rPr>
+              <a:t>双通道 + 双币种</a:t>
             </a:r>
             <a:endParaRPr lang="en-US" sz="1600" dirty="0"/>
           </a:p>
@@ -3090,11 +3090,11 @@
                 <a:solidFill>
                   <a:srgbClr val="9A9E97"/>
                 </a:solidFill>
-                <a:latin typeface="Arial" pitchFamily="34" charset="0"/>
-                <a:ea typeface="Arial" pitchFamily="34" charset="-122"/>
-                <a:cs typeface="Arial" pitchFamily="34" charset="-120"/>
-              </a:rPr>
-              <a:t>Stablecoin Direct vs Local Fiat auto-ranked by risk and cost; each payout shows settlement currency → payee's local currency.</a:t>
+                <a:latin typeface="Microsoft YaHei" pitchFamily="34" charset="0"/>
+                <a:ea typeface="Microsoft YaHei" pitchFamily="34" charset="-122"/>
+                <a:cs typeface="Microsoft YaHei" pitchFamily="34" charset="-120"/>
+              </a:rPr>
+              <a:t>稳定币直付与本地法币按风险和成本自动排序;每笔付款展示 结算币种 → 收款人本地币种。</a:t>
             </a:r>
             <a:endParaRPr lang="en-US" sz="1300" dirty="0"/>
           </a:p>
@@ -3181,11 +3181,11 @@
                 <a:solidFill>
                   <a:srgbClr val="E0783C"/>
                 </a:solidFill>
-                <a:latin typeface="Arial" pitchFamily="34" charset="0"/>
-                <a:ea typeface="Arial" pitchFamily="34" charset="-122"/>
-                <a:cs typeface="Arial" pitchFamily="34" charset="-120"/>
-              </a:rPr>
-              <a:t>WHAT'S BUILT TODAY</a:t>
+                <a:latin typeface="Microsoft YaHei" pitchFamily="34" charset="0"/>
+                <a:ea typeface="Microsoft YaHei" pitchFamily="34" charset="-122"/>
+                <a:cs typeface="Microsoft YaHei" pitchFamily="34" charset="-120"/>
+              </a:rPr>
+              <a:t>已交付</a:t>
             </a:r>
             <a:endParaRPr lang="en-US" sz="1200" dirty="0"/>
           </a:p>
@@ -3220,11 +3220,11 @@
                 <a:solidFill>
                   <a:srgbClr val="EDEBE5"/>
                 </a:solidFill>
-                <a:latin typeface="Arial" pitchFamily="34" charset="0"/>
-                <a:ea typeface="Arial" pitchFamily="34" charset="-122"/>
-                <a:cs typeface="Arial" pitchFamily="34" charset="-120"/>
-              </a:rPr>
-              <a:t>A working MVP — live, not slideware</a:t>
+                <a:latin typeface="Microsoft YaHei" pitchFamily="34" charset="0"/>
+                <a:ea typeface="Microsoft YaHei" pitchFamily="34" charset="-122"/>
+                <a:cs typeface="Microsoft YaHei" pitchFamily="34" charset="-120"/>
+              </a:rPr>
+              <a:t>可运行的 MVP —— 真跑通,不是幻灯片</a:t>
             </a:r>
             <a:endParaRPr lang="en-US" sz="3000" dirty="0"/>
           </a:p>
@@ -3286,9 +3286,9 @@
                 <a:solidFill>
                   <a:srgbClr val="E0783C"/>
                 </a:solidFill>
-                <a:latin typeface="Arial" pitchFamily="34" charset="0"/>
-                <a:ea typeface="Arial" pitchFamily="34" charset="-122"/>
-                <a:cs typeface="Arial" pitchFamily="34" charset="-120"/>
+                <a:latin typeface="Microsoft YaHei" pitchFamily="34" charset="0"/>
+                <a:ea typeface="Microsoft YaHei" pitchFamily="34" charset="-122"/>
+                <a:cs typeface="Microsoft YaHei" pitchFamily="34" charset="-120"/>
               </a:rPr>
               <a:t>01</a:t>
             </a:r>
@@ -3325,11 +3325,11 @@
                 <a:solidFill>
                   <a:srgbClr val="EDEBE5"/>
                 </a:solidFill>
-                <a:latin typeface="Arial" pitchFamily="34" charset="0"/>
-                <a:ea typeface="Arial" pitchFamily="34" charset="-122"/>
-                <a:cs typeface="Arial" pitchFamily="34" charset="-120"/>
-              </a:rPr>
-              <a:t>Full control loop</a:t>
+                <a:latin typeface="Microsoft YaHei" pitchFamily="34" charset="0"/>
+                <a:ea typeface="Microsoft YaHei" pitchFamily="34" charset="-122"/>
+                <a:cs typeface="Microsoft YaHei" pitchFamily="34" charset="-120"/>
+              </a:rPr>
+              <a:t>完整控制闭环</a:t>
             </a:r>
             <a:endParaRPr lang="en-US" sz="1600" dirty="0"/>
           </a:p>
@@ -3364,11 +3364,11 @@
                 <a:solidFill>
                   <a:srgbClr val="9A9E97"/>
                 </a:solidFill>
-                <a:latin typeface="Arial" pitchFamily="34" charset="0"/>
-                <a:ea typeface="Arial" pitchFamily="34" charset="-122"/>
-                <a:cs typeface="Arial" pitchFamily="34" charset="-120"/>
-              </a:rPr>
-              <a:t>Precheck → verify-with-supplier → dual approve → execute (MT103 / wallet) → payee arrival receipt → auto-reconcile, fully wired.</a:t>
+                <a:latin typeface="Microsoft YaHei" pitchFamily="34" charset="0"/>
+                <a:ea typeface="Microsoft YaHei" pitchFamily="34" charset="-122"/>
+                <a:cs typeface="Microsoft YaHei" pitchFamily="34" charset="-120"/>
+              </a:rPr>
+              <a:t>预检 → 供应商核查 → 双人审批 → 执行(MT103 / 钱包)→ 收款方到账回执 → 自动对账,全链路打通。</a:t>
             </a:r>
             <a:endParaRPr lang="en-US" sz="1300" dirty="0"/>
           </a:p>
@@ -3430,9 +3430,9 @@
                 <a:solidFill>
                   <a:srgbClr val="E0783C"/>
                 </a:solidFill>
-                <a:latin typeface="Arial" pitchFamily="34" charset="0"/>
-                <a:ea typeface="Arial" pitchFamily="34" charset="-122"/>
-                <a:cs typeface="Arial" pitchFamily="34" charset="-120"/>
+                <a:latin typeface="Microsoft YaHei" pitchFamily="34" charset="0"/>
+                <a:ea typeface="Microsoft YaHei" pitchFamily="34" charset="-122"/>
+                <a:cs typeface="Microsoft YaHei" pitchFamily="34" charset="-120"/>
               </a:rPr>
               <a:t>02</a:t>
             </a:r>
@@ -3469,11 +3469,11 @@
                 <a:solidFill>
                   <a:srgbClr val="EDEBE5"/>
                 </a:solidFill>
-                <a:latin typeface="Arial" pitchFamily="34" charset="0"/>
-                <a:ea typeface="Arial" pitchFamily="34" charset="-122"/>
-                <a:cs typeface="Arial" pitchFamily="34" charset="-120"/>
-              </a:rPr>
-              <a:t>Verified risk clears itself</a:t>
+                <a:latin typeface="Microsoft YaHei" pitchFamily="34" charset="0"/>
+                <a:ea typeface="Microsoft YaHei" pitchFamily="34" charset="-122"/>
+                <a:cs typeface="Microsoft YaHei" pitchFamily="34" charset="-120"/>
+              </a:rPr>
+              <a:t>核实即自动清风险</a:t>
             </a:r>
             <a:endParaRPr lang="en-US" sz="1600" dirty="0"/>
           </a:p>
@@ -3508,11 +3508,11 @@
                 <a:solidFill>
                   <a:srgbClr val="9A9E97"/>
                 </a:solidFill>
-                <a:latin typeface="Arial" pitchFamily="34" charset="0"/>
-                <a:ea typeface="Arial" pitchFamily="34" charset="-122"/>
-                <a:cs typeface="Arial" pitchFamily="34" charset="-120"/>
-              </a:rPr>
-              <a:t>When a supplier confirms a flagged detail, the case resolves and the risk score / blocker recompute automatically — no manual fudging.</a:t>
+                <a:latin typeface="Microsoft YaHei" pitchFamily="34" charset="0"/>
+                <a:ea typeface="Microsoft YaHei" pitchFamily="34" charset="-122"/>
+                <a:cs typeface="Microsoft YaHei" pitchFamily="34" charset="-120"/>
+              </a:rPr>
+              <a:t>供应商确认被标问题后,Case 关闭,风险分 / 阻断自动复算 —— 无需人工硬改。</a:t>
             </a:r>
             <a:endParaRPr lang="en-US" sz="1300" dirty="0"/>
           </a:p>
@@ -3574,9 +3574,9 @@
                 <a:solidFill>
                   <a:srgbClr val="E0783C"/>
                 </a:solidFill>
-                <a:latin typeface="Arial" pitchFamily="34" charset="0"/>
-                <a:ea typeface="Arial" pitchFamily="34" charset="-122"/>
-                <a:cs typeface="Arial" pitchFamily="34" charset="-120"/>
+                <a:latin typeface="Microsoft YaHei" pitchFamily="34" charset="0"/>
+                <a:ea typeface="Microsoft YaHei" pitchFamily="34" charset="-122"/>
+                <a:cs typeface="Microsoft YaHei" pitchFamily="34" charset="-120"/>
               </a:rPr>
               <a:t>03</a:t>
             </a:r>
@@ -3613,11 +3613,11 @@
                 <a:solidFill>
                   <a:srgbClr val="EDEBE5"/>
                 </a:solidFill>
-                <a:latin typeface="Arial" pitchFamily="34" charset="0"/>
-                <a:ea typeface="Arial" pitchFamily="34" charset="-122"/>
-                <a:cs typeface="Arial" pitchFamily="34" charset="-120"/>
-              </a:rPr>
-              <a:t>Real backend</a:t>
+                <a:latin typeface="Microsoft YaHei" pitchFamily="34" charset="0"/>
+                <a:ea typeface="Microsoft YaHei" pitchFamily="34" charset="-122"/>
+                <a:cs typeface="Microsoft YaHei" pitchFamily="34" charset="-120"/>
+              </a:rPr>
+              <a:t>真后端</a:t>
             </a:r>
             <a:endParaRPr lang="en-US" sz="1600" dirty="0"/>
           </a:p>
@@ -3652,11 +3652,11 @@
                 <a:solidFill>
                   <a:srgbClr val="9A9E97"/>
                 </a:solidFill>
-                <a:latin typeface="Arial" pitchFamily="34" charset="0"/>
-                <a:ea typeface="Arial" pitchFamily="34" charset="-122"/>
-                <a:cs typeface="Arial" pitchFamily="34" charset="-120"/>
-              </a:rPr>
-              <a:t>PostgreSQL with multi-tenant isolation, auth guards, a server-enforced state machine, and an audit trail on every payment and case.</a:t>
+                <a:latin typeface="Microsoft YaHei" pitchFamily="34" charset="0"/>
+                <a:ea typeface="Microsoft YaHei" pitchFamily="34" charset="-122"/>
+                <a:cs typeface="Microsoft YaHei" pitchFamily="34" charset="-120"/>
+              </a:rPr>
+              <a:t>PostgreSQL 多租户隔离、鉴权守卫、服务端强制状态机,每笔付款与 Case 均有审计轨迹。</a:t>
             </a:r>
             <a:endParaRPr lang="en-US" sz="1300" dirty="0"/>
           </a:p>
@@ -3718,9 +3718,9 @@
                 <a:solidFill>
                   <a:srgbClr val="E0783C"/>
                 </a:solidFill>
-                <a:latin typeface="Arial" pitchFamily="34" charset="0"/>
-                <a:ea typeface="Arial" pitchFamily="34" charset="-122"/>
-                <a:cs typeface="Arial" pitchFamily="34" charset="-120"/>
+                <a:latin typeface="Microsoft YaHei" pitchFamily="34" charset="0"/>
+                <a:ea typeface="Microsoft YaHei" pitchFamily="34" charset="-122"/>
+                <a:cs typeface="Microsoft YaHei" pitchFamily="34" charset="-120"/>
               </a:rPr>
               <a:t>04</a:t>
             </a:r>
@@ -3757,11 +3757,11 @@
                 <a:solidFill>
                   <a:srgbClr val="EDEBE5"/>
                 </a:solidFill>
-                <a:latin typeface="Arial" pitchFamily="34" charset="0"/>
-                <a:ea typeface="Arial" pitchFamily="34" charset="-122"/>
-                <a:cs typeface="Arial" pitchFamily="34" charset="-120"/>
-              </a:rPr>
-              <a:t>Login-free proof of arrival</a:t>
+                <a:latin typeface="Microsoft YaHei" pitchFamily="34" charset="0"/>
+                <a:ea typeface="Microsoft YaHei" pitchFamily="34" charset="-122"/>
+                <a:cs typeface="Microsoft YaHei" pitchFamily="34" charset="-120"/>
+              </a:rPr>
+              <a:t>免登录到账证明</a:t>
             </a:r>
             <a:endParaRPr lang="en-US" sz="1600" dirty="0"/>
           </a:p>
@@ -3796,11 +3796,11 @@
                 <a:solidFill>
                   <a:srgbClr val="9A9E97"/>
                 </a:solidFill>
-                <a:latin typeface="Arial" pitchFamily="34" charset="0"/>
-                <a:ea typeface="Arial" pitchFamily="34" charset="-122"/>
-                <a:cs typeface="Arial" pitchFamily="34" charset="-120"/>
-              </a:rPr>
-              <a:t>The payee confirms receipt via an unguessable token link; it's stored as real settlement evidence and auto-matched in reconciliation.</a:t>
+                <a:latin typeface="Microsoft YaHei" pitchFamily="34" charset="0"/>
+                <a:ea typeface="Microsoft YaHei" pitchFamily="34" charset="-122"/>
+                <a:cs typeface="Microsoft YaHei" pitchFamily="34" charset="-120"/>
+              </a:rPr>
+              <a:t>收款人通过不可猜测的 token 链接确认收款;确认作为真实结算凭据存证,并在对账中自动匹配。</a:t>
             </a:r>
             <a:endParaRPr lang="en-US" sz="1300" dirty="0"/>
           </a:p>
@@ -3887,11 +3887,11 @@
                 <a:solidFill>
                   <a:srgbClr val="E0783C"/>
                 </a:solidFill>
-                <a:latin typeface="Arial" pitchFamily="34" charset="0"/>
-                <a:ea typeface="Arial" pitchFamily="34" charset="-122"/>
-                <a:cs typeface="Arial" pitchFamily="34" charset="-120"/>
-              </a:rPr>
-              <a:t>WHY US</a:t>
+                <a:latin typeface="Microsoft YaHei" pitchFamily="34" charset="0"/>
+                <a:ea typeface="Microsoft YaHei" pitchFamily="34" charset="-122"/>
+                <a:cs typeface="Microsoft YaHei" pitchFamily="34" charset="-120"/>
+              </a:rPr>
+              <a:t>为何是我们</a:t>
             </a:r>
             <a:endParaRPr lang="en-US" sz="1200" dirty="0"/>
           </a:p>
@@ -3926,11 +3926,11 @@
                 <a:solidFill>
                   <a:srgbClr val="EDEBE5"/>
                 </a:solidFill>
-                <a:latin typeface="Arial" pitchFamily="34" charset="0"/>
-                <a:ea typeface="Arial" pitchFamily="34" charset="-122"/>
-                <a:cs typeface="Arial" pitchFamily="34" charset="-120"/>
-              </a:rPr>
-              <a:t>Risk control before the send — not after</a:t>
+                <a:latin typeface="Microsoft YaHei" pitchFamily="34" charset="0"/>
+                <a:ea typeface="Microsoft YaHei" pitchFamily="34" charset="-122"/>
+                <a:cs typeface="Microsoft YaHei" pitchFamily="34" charset="-120"/>
+              </a:rPr>
+              <a:t>在付款离账前控风险 —— 而非事后</a:t>
             </a:r>
             <a:endParaRPr lang="en-US" sz="3000" dirty="0"/>
           </a:p>
@@ -3992,9 +3992,9 @@
                 <a:solidFill>
                   <a:srgbClr val="E0783C"/>
                 </a:solidFill>
-                <a:latin typeface="Arial" pitchFamily="34" charset="0"/>
-                <a:ea typeface="Arial" pitchFamily="34" charset="-122"/>
-                <a:cs typeface="Arial" pitchFamily="34" charset="-120"/>
+                <a:latin typeface="Microsoft YaHei" pitchFamily="34" charset="0"/>
+                <a:ea typeface="Microsoft YaHei" pitchFamily="34" charset="-122"/>
+                <a:cs typeface="Microsoft YaHei" pitchFamily="34" charset="-120"/>
               </a:rPr>
               <a:t>01</a:t>
             </a:r>
@@ -4031,11 +4031,11 @@
                 <a:solidFill>
                   <a:srgbClr val="EDEBE5"/>
                 </a:solidFill>
-                <a:latin typeface="Arial" pitchFamily="34" charset="0"/>
-                <a:ea typeface="Arial" pitchFamily="34" charset="-122"/>
-                <a:cs typeface="Arial" pitchFamily="34" charset="-120"/>
-              </a:rPr>
-              <a:t>Pre-send, not post-hoc</a:t>
+                <a:latin typeface="Microsoft YaHei" pitchFamily="34" charset="0"/>
+                <a:ea typeface="Microsoft YaHei" pitchFamily="34" charset="-122"/>
+                <a:cs typeface="Microsoft YaHei" pitchFamily="34" charset="-120"/>
+              </a:rPr>
+              <a:t>事前拦截,而非事后补救</a:t>
             </a:r>
             <a:endParaRPr lang="en-US" sz="1600" dirty="0"/>
           </a:p>
@@ -4070,11 +4070,11 @@
                 <a:solidFill>
                   <a:srgbClr val="9A9E97"/>
                 </a:solidFill>
-                <a:latin typeface="Arial" pitchFamily="34" charset="0"/>
-                <a:ea typeface="Arial" pitchFamily="34" charset="-122"/>
-                <a:cs typeface="Arial" pitchFamily="34" charset="-120"/>
-              </a:rPr>
-              <a:t>Competitors reconcile after failure. We block it first — and clear it by verifying with the supplier.</a:t>
+                <a:latin typeface="Microsoft YaHei" pitchFamily="34" charset="0"/>
+                <a:ea typeface="Microsoft YaHei" pitchFamily="34" charset="-122"/>
+                <a:cs typeface="Microsoft YaHei" pitchFamily="34" charset="-120"/>
+              </a:rPr>
+              <a:t>同类产品在失败后才对账。我们先拦住失败 —— 并通过向供应商核查来清除它。</a:t>
             </a:r>
             <a:endParaRPr lang="en-US" sz="1300" dirty="0"/>
           </a:p>
@@ -4136,9 +4136,9 @@
                 <a:solidFill>
                   <a:srgbClr val="E0783C"/>
                 </a:solidFill>
-                <a:latin typeface="Arial" pitchFamily="34" charset="0"/>
-                <a:ea typeface="Arial" pitchFamily="34" charset="-122"/>
-                <a:cs typeface="Arial" pitchFamily="34" charset="-120"/>
+                <a:latin typeface="Microsoft YaHei" pitchFamily="34" charset="0"/>
+                <a:ea typeface="Microsoft YaHei" pitchFamily="34" charset="-122"/>
+                <a:cs typeface="Microsoft YaHei" pitchFamily="34" charset="-120"/>
               </a:rPr>
               <a:t>02</a:t>
             </a:r>
@@ -4175,11 +4175,11 @@
                 <a:solidFill>
                   <a:srgbClr val="EDEBE5"/>
                 </a:solidFill>
-                <a:latin typeface="Arial" pitchFamily="34" charset="0"/>
-                <a:ea typeface="Arial" pitchFamily="34" charset="-122"/>
-                <a:cs typeface="Arial" pitchFamily="34" charset="-120"/>
-              </a:rPr>
-              <a:t>Two rails, one decision</a:t>
+                <a:latin typeface="Microsoft YaHei" pitchFamily="34" charset="0"/>
+                <a:ea typeface="Microsoft YaHei" pitchFamily="34" charset="-122"/>
+                <a:cs typeface="Microsoft YaHei" pitchFamily="34" charset="-120"/>
+              </a:rPr>
+              <a:t>两条通道,一次决策</a:t>
             </a:r>
             <a:endParaRPr lang="en-US" sz="1600" dirty="0"/>
           </a:p>
@@ -4214,11 +4214,11 @@
                 <a:solidFill>
                   <a:srgbClr val="9A9E97"/>
                 </a:solidFill>
-                <a:latin typeface="Arial" pitchFamily="34" charset="0"/>
-                <a:ea typeface="Arial" pitchFamily="34" charset="-122"/>
-                <a:cs typeface="Arial" pitchFamily="34" charset="-120"/>
-              </a:rPr>
-              <a:t>Stablecoin and local fiat compared in the same flow, with dual settlement / payee currency.</a:t>
+                <a:latin typeface="Microsoft YaHei" pitchFamily="34" charset="0"/>
+                <a:ea typeface="Microsoft YaHei" pitchFamily="34" charset="-122"/>
+                <a:cs typeface="Microsoft YaHei" pitchFamily="34" charset="-120"/>
+              </a:rPr>
+              <a:t>稳定币与本地法币在同一流程中比较,并带结算 / 到账双币种。</a:t>
             </a:r>
             <a:endParaRPr lang="en-US" sz="1300" dirty="0"/>
           </a:p>
@@ -4280,9 +4280,9 @@
                 <a:solidFill>
                   <a:srgbClr val="E0783C"/>
                 </a:solidFill>
-                <a:latin typeface="Arial" pitchFamily="34" charset="0"/>
-                <a:ea typeface="Arial" pitchFamily="34" charset="-122"/>
-                <a:cs typeface="Arial" pitchFamily="34" charset="-120"/>
+                <a:latin typeface="Microsoft YaHei" pitchFamily="34" charset="0"/>
+                <a:ea typeface="Microsoft YaHei" pitchFamily="34" charset="-122"/>
+                <a:cs typeface="Microsoft YaHei" pitchFamily="34" charset="-120"/>
               </a:rPr>
               <a:t>03</a:t>
             </a:r>
@@ -4319,11 +4319,11 @@
                 <a:solidFill>
                   <a:srgbClr val="EDEBE5"/>
                 </a:solidFill>
-                <a:latin typeface="Arial" pitchFamily="34" charset="0"/>
-                <a:ea typeface="Arial" pitchFamily="34" charset="-122"/>
-                <a:cs typeface="Arial" pitchFamily="34" charset="-120"/>
-              </a:rPr>
-              <a:t>Compliance is native</a:t>
+                <a:latin typeface="Microsoft YaHei" pitchFamily="34" charset="0"/>
+                <a:ea typeface="Microsoft YaHei" pitchFamily="34" charset="-122"/>
+                <a:cs typeface="Microsoft YaHei" pitchFamily="34" charset="-120"/>
+              </a:rPr>
+              <a:t>合规是原生的</a:t>
             </a:r>
             <a:endParaRPr lang="en-US" sz="1600" dirty="0"/>
           </a:p>
@@ -4358,11 +4358,11 @@
                 <a:solidFill>
                   <a:srgbClr val="9A9E97"/>
                 </a:solidFill>
-                <a:latin typeface="Arial" pitchFamily="34" charset="0"/>
-                <a:ea typeface="Arial" pitchFamily="34" charset="-122"/>
-                <a:cs typeface="Arial" pitchFamily="34" charset="-120"/>
-              </a:rPr>
-              <a:t>Amount-tier lanes, enforced maker-checker, and a full audit trail are core — not a bolt-on.</a:t>
+                <a:latin typeface="Microsoft YaHei" pitchFamily="34" charset="0"/>
+                <a:ea typeface="Microsoft YaHei" pitchFamily="34" charset="-122"/>
+                <a:cs typeface="Microsoft YaHei" pitchFamily="34" charset="-120"/>
+              </a:rPr>
+              <a:t>金额分档车道、强制经办—审批、完整审计轨迹是核心 —— 而非附加功能。</a:t>
             </a:r>
             <a:endParaRPr lang="en-US" sz="1300" dirty="0"/>
           </a:p>
@@ -4449,11 +4449,11 @@
                 <a:solidFill>
                   <a:srgbClr val="E0783C"/>
                 </a:solidFill>
-                <a:latin typeface="Arial" pitchFamily="34" charset="0"/>
-                <a:ea typeface="Arial" pitchFamily="34" charset="-122"/>
-                <a:cs typeface="Arial" pitchFamily="34" charset="-120"/>
-              </a:rPr>
-              <a:t>BUSINESS MODEL</a:t>
+                <a:latin typeface="Microsoft YaHei" pitchFamily="34" charset="0"/>
+                <a:ea typeface="Microsoft YaHei" pitchFamily="34" charset="-122"/>
+                <a:cs typeface="Microsoft YaHei" pitchFamily="34" charset="-120"/>
+              </a:rPr>
+              <a:t>商业模式</a:t>
             </a:r>
             <a:endParaRPr lang="en-US" sz="1200" dirty="0"/>
           </a:p>
@@ -4488,11 +4488,11 @@
                 <a:solidFill>
                   <a:srgbClr val="EDEBE5"/>
                 </a:solidFill>
-                <a:latin typeface="Arial" pitchFamily="34" charset="0"/>
-                <a:ea typeface="Arial" pitchFamily="34" charset="-122"/>
-                <a:cs typeface="Arial" pitchFamily="34" charset="-120"/>
-              </a:rPr>
-              <a:t>Three aligned revenue lines</a:t>
+                <a:latin typeface="Microsoft YaHei" pitchFamily="34" charset="0"/>
+                <a:ea typeface="Microsoft YaHei" pitchFamily="34" charset="-122"/>
+                <a:cs typeface="Microsoft YaHei" pitchFamily="34" charset="-120"/>
+              </a:rPr>
+              <a:t>三条彼此对齐的收入线</a:t>
             </a:r>
             <a:endParaRPr lang="en-US" sz="3000" dirty="0"/>
           </a:p>
@@ -4554,9 +4554,9 @@
                 <a:solidFill>
                   <a:srgbClr val="E0783C"/>
                 </a:solidFill>
-                <a:latin typeface="Arial" pitchFamily="34" charset="0"/>
-                <a:ea typeface="Arial" pitchFamily="34" charset="-122"/>
-                <a:cs typeface="Arial" pitchFamily="34" charset="-120"/>
+                <a:latin typeface="Microsoft YaHei" pitchFamily="34" charset="0"/>
+                <a:ea typeface="Microsoft YaHei" pitchFamily="34" charset="-122"/>
+                <a:cs typeface="Microsoft YaHei" pitchFamily="34" charset="-120"/>
               </a:rPr>
               <a:t>01</a:t>
             </a:r>
@@ -4593,11 +4593,11 @@
                 <a:solidFill>
                   <a:srgbClr val="EDEBE5"/>
                 </a:solidFill>
-                <a:latin typeface="Arial" pitchFamily="34" charset="0"/>
-                <a:ea typeface="Arial" pitchFamily="34" charset="-122"/>
-                <a:cs typeface="Arial" pitchFamily="34" charset="-120"/>
-              </a:rPr>
-              <a:t>Per-payout fee</a:t>
+                <a:latin typeface="Microsoft YaHei" pitchFamily="34" charset="0"/>
+                <a:ea typeface="Microsoft YaHei" pitchFamily="34" charset="-122"/>
+                <a:cs typeface="Microsoft YaHei" pitchFamily="34" charset="-120"/>
+              </a:rPr>
+              <a:t>按笔付款费</a:t>
             </a:r>
             <a:endParaRPr lang="en-US" sz="1600" dirty="0"/>
           </a:p>
@@ -4632,11 +4632,11 @@
                 <a:solidFill>
                   <a:srgbClr val="9A9E97"/>
                 </a:solidFill>
-                <a:latin typeface="Arial" pitchFamily="34" charset="0"/>
-                <a:ea typeface="Arial" pitchFamily="34" charset="-122"/>
-                <a:cs typeface="Arial" pitchFamily="34" charset="-120"/>
-              </a:rPr>
-              <a:t>A small take rate on each successfully de-risked payout.</a:t>
+                <a:latin typeface="Microsoft YaHei" pitchFamily="34" charset="0"/>
+                <a:ea typeface="Microsoft YaHei" pitchFamily="34" charset="-122"/>
+                <a:cs typeface="Microsoft YaHei" pitchFamily="34" charset="-120"/>
+              </a:rPr>
+              <a:t>对每笔成功降风险的付款收取小额费率。</a:t>
             </a:r>
             <a:endParaRPr lang="en-US" sz="1300" dirty="0"/>
           </a:p>
@@ -4698,9 +4698,9 @@
                 <a:solidFill>
                   <a:srgbClr val="E0783C"/>
                 </a:solidFill>
-                <a:latin typeface="Arial" pitchFamily="34" charset="0"/>
-                <a:ea typeface="Arial" pitchFamily="34" charset="-122"/>
-                <a:cs typeface="Arial" pitchFamily="34" charset="-120"/>
+                <a:latin typeface="Microsoft YaHei" pitchFamily="34" charset="0"/>
+                <a:ea typeface="Microsoft YaHei" pitchFamily="34" charset="-122"/>
+                <a:cs typeface="Microsoft YaHei" pitchFamily="34" charset="-120"/>
               </a:rPr>
               <a:t>02</a:t>
             </a:r>
@@ -4737,11 +4737,11 @@
                 <a:solidFill>
                   <a:srgbClr val="EDEBE5"/>
                 </a:solidFill>
-                <a:latin typeface="Arial" pitchFamily="34" charset="0"/>
-                <a:ea typeface="Arial" pitchFamily="34" charset="-122"/>
-                <a:cs typeface="Arial" pitchFamily="34" charset="-120"/>
-              </a:rPr>
-              <a:t>SaaS subscription</a:t>
+                <a:latin typeface="Microsoft YaHei" pitchFamily="34" charset="0"/>
+                <a:ea typeface="Microsoft YaHei" pitchFamily="34" charset="-122"/>
+                <a:cs typeface="Microsoft YaHei" pitchFamily="34" charset="-120"/>
+              </a:rPr>
+              <a:t>SaaS 订阅</a:t>
             </a:r>
             <a:endParaRPr lang="en-US" sz="1600" dirty="0"/>
           </a:p>
@@ -4776,11 +4776,11 @@
                 <a:solidFill>
                   <a:srgbClr val="9A9E97"/>
                 </a:solidFill>
-                <a:latin typeface="Arial" pitchFamily="34" charset="0"/>
-                <a:ea typeface="Arial" pitchFamily="34" charset="-122"/>
-                <a:cs typeface="Arial" pitchFamily="34" charset="-120"/>
-              </a:rPr>
-              <a:t>Seat + tier pricing for teams needing dual control and audit.</a:t>
+                <a:latin typeface="Microsoft YaHei" pitchFamily="34" charset="0"/>
+                <a:ea typeface="Microsoft YaHei" pitchFamily="34" charset="-122"/>
+                <a:cs typeface="Microsoft YaHei" pitchFamily="34" charset="-120"/>
+              </a:rPr>
+              <a:t>面向需要双人控制与审计的团队,按席位 + 档位定价。</a:t>
             </a:r>
             <a:endParaRPr lang="en-US" sz="1300" dirty="0"/>
           </a:p>
@@ -4842,9 +4842,9 @@
                 <a:solidFill>
                   <a:srgbClr val="E0783C"/>
                 </a:solidFill>
-                <a:latin typeface="Arial" pitchFamily="34" charset="0"/>
-                <a:ea typeface="Arial" pitchFamily="34" charset="-122"/>
-                <a:cs typeface="Arial" pitchFamily="34" charset="-120"/>
+                <a:latin typeface="Microsoft YaHei" pitchFamily="34" charset="0"/>
+                <a:ea typeface="Microsoft YaHei" pitchFamily="34" charset="-122"/>
+                <a:cs typeface="Microsoft YaHei" pitchFamily="34" charset="-120"/>
               </a:rPr>
               <a:t>03</a:t>
             </a:r>
@@ -4881,11 +4881,11 @@
                 <a:solidFill>
                   <a:srgbClr val="EDEBE5"/>
                 </a:solidFill>
-                <a:latin typeface="Arial" pitchFamily="34" charset="0"/>
-                <a:ea typeface="Arial" pitchFamily="34" charset="-122"/>
-                <a:cs typeface="Arial" pitchFamily="34" charset="-120"/>
-              </a:rPr>
-              <a:t>Rail rebates</a:t>
+                <a:latin typeface="Microsoft YaHei" pitchFamily="34" charset="0"/>
+                <a:ea typeface="Microsoft YaHei" pitchFamily="34" charset="-122"/>
+                <a:cs typeface="Microsoft YaHei" pitchFamily="34" charset="-120"/>
+              </a:rPr>
+              <a:t>通道返佣</a:t>
             </a:r>
             <a:endParaRPr lang="en-US" sz="1600" dirty="0"/>
           </a:p>
@@ -4920,11 +4920,11 @@
                 <a:solidFill>
                   <a:srgbClr val="9A9E97"/>
                 </a:solidFill>
-                <a:latin typeface="Arial" pitchFamily="34" charset="0"/>
-                <a:ea typeface="Arial" pitchFamily="34" charset="-122"/>
-                <a:cs typeface="Arial" pitchFamily="34" charset="-120"/>
-              </a:rPr>
-              <a:t>Share of savings from routing volume to the optimal rail.</a:t>
+                <a:latin typeface="Microsoft YaHei" pitchFamily="34" charset="0"/>
+                <a:ea typeface="Microsoft YaHei" pitchFamily="34" charset="-122"/>
+                <a:cs typeface="Microsoft YaHei" pitchFamily="34" charset="-120"/>
+              </a:rPr>
+              <a:t>从把交易量路由到最优通道所节省的成本中分成。</a:t>
             </a:r>
             <a:endParaRPr lang="en-US" sz="1300" dirty="0"/>
           </a:p>
@@ -5011,11 +5011,11 @@
                 <a:solidFill>
                   <a:srgbClr val="E0783C"/>
                 </a:solidFill>
-                <a:latin typeface="Arial" pitchFamily="34" charset="0"/>
-                <a:ea typeface="Arial" pitchFamily="34" charset="-122"/>
-                <a:cs typeface="Arial" pitchFamily="34" charset="-120"/>
-              </a:rPr>
-              <a:t>ROADMAP</a:t>
+                <a:latin typeface="Microsoft YaHei" pitchFamily="34" charset="0"/>
+                <a:ea typeface="Microsoft YaHei" pitchFamily="34" charset="-122"/>
+                <a:cs typeface="Microsoft YaHei" pitchFamily="34" charset="-120"/>
+              </a:rPr>
+              <a:t>路线图</a:t>
             </a:r>
             <a:endParaRPr lang="en-US" sz="1200" dirty="0"/>
           </a:p>
@@ -5050,11 +5050,11 @@
                 <a:solidFill>
                   <a:srgbClr val="EDEBE5"/>
                 </a:solidFill>
-                <a:latin typeface="Arial" pitchFamily="34" charset="0"/>
-                <a:ea typeface="Arial" pitchFamily="34" charset="-122"/>
-                <a:cs typeface="Arial" pitchFamily="34" charset="-120"/>
-              </a:rPr>
-              <a:t>From simulation to real rails</a:t>
+                <a:latin typeface="Microsoft YaHei" pitchFamily="34" charset="0"/>
+                <a:ea typeface="Microsoft YaHei" pitchFamily="34" charset="-122"/>
+                <a:cs typeface="Microsoft YaHei" pitchFamily="34" charset="-120"/>
+              </a:rPr>
+              <a:t>从模拟走向真实通道</a:t>
             </a:r>
             <a:endParaRPr lang="en-US" sz="3000" dirty="0"/>
           </a:p>
@@ -5116,9 +5116,9 @@
                 <a:solidFill>
                   <a:srgbClr val="E0783C"/>
                 </a:solidFill>
-                <a:latin typeface="Arial" pitchFamily="34" charset="0"/>
-                <a:ea typeface="Arial" pitchFamily="34" charset="-122"/>
-                <a:cs typeface="Arial" pitchFamily="34" charset="-120"/>
+                <a:latin typeface="Microsoft YaHei" pitchFamily="34" charset="0"/>
+                <a:ea typeface="Microsoft YaHei" pitchFamily="34" charset="-122"/>
+                <a:cs typeface="Microsoft YaHei" pitchFamily="34" charset="-120"/>
               </a:rPr>
               <a:t>01</a:t>
             </a:r>
@@ -5155,11 +5155,11 @@
                 <a:solidFill>
                   <a:srgbClr val="EDEBE5"/>
                 </a:solidFill>
-                <a:latin typeface="Arial" pitchFamily="34" charset="0"/>
-                <a:ea typeface="Arial" pitchFamily="34" charset="-122"/>
-                <a:cs typeface="Arial" pitchFamily="34" charset="-120"/>
-              </a:rPr>
-              <a:t>Live rail integrations</a:t>
+                <a:latin typeface="Microsoft YaHei" pitchFamily="34" charset="0"/>
+                <a:ea typeface="Microsoft YaHei" pitchFamily="34" charset="-122"/>
+                <a:cs typeface="Microsoft YaHei" pitchFamily="34" charset="-120"/>
+              </a:rPr>
+              <a:t>真实通道接入</a:t>
             </a:r>
             <a:endParaRPr lang="en-US" sz="1600" dirty="0"/>
           </a:p>
@@ -5194,11 +5194,11 @@
                 <a:solidFill>
                   <a:srgbClr val="9A9E97"/>
                 </a:solidFill>
-                <a:latin typeface="Arial" pitchFamily="34" charset="0"/>
-                <a:ea typeface="Arial" pitchFamily="34" charset="-122"/>
-                <a:cs typeface="Arial" pitchFamily="34" charset="-120"/>
-              </a:rPr>
-              <a:t>Connect real stablecoin and local-fiat payout providers.</a:t>
+                <a:latin typeface="Microsoft YaHei" pitchFamily="34" charset="0"/>
+                <a:ea typeface="Microsoft YaHei" pitchFamily="34" charset="-122"/>
+                <a:cs typeface="Microsoft YaHei" pitchFamily="34" charset="-120"/>
+              </a:rPr>
+              <a:t>接入真实的稳定币与本地法币付款服务商。</a:t>
             </a:r>
             <a:endParaRPr lang="en-US" sz="1300" dirty="0"/>
           </a:p>
@@ -5260,9 +5260,9 @@
                 <a:solidFill>
                   <a:srgbClr val="E0783C"/>
                 </a:solidFill>
-                <a:latin typeface="Arial" pitchFamily="34" charset="0"/>
-                <a:ea typeface="Arial" pitchFamily="34" charset="-122"/>
-                <a:cs typeface="Arial" pitchFamily="34" charset="-120"/>
+                <a:latin typeface="Microsoft YaHei" pitchFamily="34" charset="0"/>
+                <a:ea typeface="Microsoft YaHei" pitchFamily="34" charset="-122"/>
+                <a:cs typeface="Microsoft YaHei" pitchFamily="34" charset="-120"/>
               </a:rPr>
               <a:t>02</a:t>
             </a:r>
@@ -5299,11 +5299,11 @@
                 <a:solidFill>
                   <a:srgbClr val="EDEBE5"/>
                 </a:solidFill>
-                <a:latin typeface="Arial" pitchFamily="34" charset="0"/>
-                <a:ea typeface="Arial" pitchFamily="34" charset="-122"/>
-                <a:cs typeface="Arial" pitchFamily="34" charset="-120"/>
-              </a:rPr>
-              <a:t>On-chain escrow</a:t>
+                <a:latin typeface="Microsoft YaHei" pitchFamily="34" charset="0"/>
+                <a:ea typeface="Microsoft YaHei" pitchFamily="34" charset="-122"/>
+                <a:cs typeface="Microsoft YaHei" pitchFamily="34" charset="-120"/>
+              </a:rPr>
+              <a:t>链上托管</a:t>
             </a:r>
             <a:endParaRPr lang="en-US" sz="1600" dirty="0"/>
           </a:p>
@@ -5338,11 +5338,11 @@
                 <a:solidFill>
                   <a:srgbClr val="9A9E97"/>
                 </a:solidFill>
-                <a:latin typeface="Arial" pitchFamily="34" charset="0"/>
-                <a:ea typeface="Arial" pitchFamily="34" charset="-122"/>
-                <a:cs typeface="Arial" pitchFamily="34" charset="-120"/>
-              </a:rPr>
-              <a:t>Persist escrow to the backend and settle on real chains.</a:t>
+                <a:latin typeface="Microsoft YaHei" pitchFamily="34" charset="0"/>
+                <a:ea typeface="Microsoft YaHei" pitchFamily="34" charset="-122"/>
+                <a:cs typeface="Microsoft YaHei" pitchFamily="34" charset="-120"/>
+              </a:rPr>
+              <a:t>把托管持久化到后端,并在真实链上结算。</a:t>
             </a:r>
             <a:endParaRPr lang="en-US" sz="1300" dirty="0"/>
           </a:p>
@@ -5404,9 +5404,9 @@
                 <a:solidFill>
                   <a:srgbClr val="E0783C"/>
                 </a:solidFill>
-                <a:latin typeface="Arial" pitchFamily="34" charset="0"/>
-                <a:ea typeface="Arial" pitchFamily="34" charset="-122"/>
-                <a:cs typeface="Arial" pitchFamily="34" charset="-120"/>
+                <a:latin typeface="Microsoft YaHei" pitchFamily="34" charset="0"/>
+                <a:ea typeface="Microsoft YaHei" pitchFamily="34" charset="-122"/>
+                <a:cs typeface="Microsoft YaHei" pitchFamily="34" charset="-120"/>
               </a:rPr>
               <a:t>03</a:t>
             </a:r>
@@ -5443,11 +5443,11 @@
                 <a:solidFill>
                   <a:srgbClr val="EDEBE5"/>
                 </a:solidFill>
-                <a:latin typeface="Arial" pitchFamily="34" charset="0"/>
-                <a:ea typeface="Arial" pitchFamily="34" charset="-122"/>
-                <a:cs typeface="Arial" pitchFamily="34" charset="-120"/>
-              </a:rPr>
-              <a:t>Multi-currency</a:t>
+                <a:latin typeface="Microsoft YaHei" pitchFamily="34" charset="0"/>
+                <a:ea typeface="Microsoft YaHei" pitchFamily="34" charset="-122"/>
+                <a:cs typeface="Microsoft YaHei" pitchFamily="34" charset="-120"/>
+              </a:rPr>
+              <a:t>多币种</a:t>
             </a:r>
             <a:endParaRPr lang="en-US" sz="1600" dirty="0"/>
           </a:p>
@@ -5482,11 +5482,11 @@
                 <a:solidFill>
                   <a:srgbClr val="9A9E97"/>
                 </a:solidFill>
-                <a:latin typeface="Arial" pitchFamily="34" charset="0"/>
-                <a:ea typeface="Arial" pitchFamily="34" charset="-122"/>
-                <a:cs typeface="Arial" pitchFamily="34" charset="-120"/>
-              </a:rPr>
-              <a:t>Expand corridor and currency coverage.</a:t>
+                <a:latin typeface="Microsoft YaHei" pitchFamily="34" charset="0"/>
+                <a:ea typeface="Microsoft YaHei" pitchFamily="34" charset="-122"/>
+                <a:cs typeface="Microsoft YaHei" pitchFamily="34" charset="-120"/>
+              </a:rPr>
+              <a:t>扩展走廊与币种覆盖。</a:t>
             </a:r>
             <a:endParaRPr lang="en-US" sz="1300" dirty="0"/>
           </a:p>
@@ -5548,9 +5548,9 @@
                 <a:solidFill>
                   <a:srgbClr val="E0783C"/>
                 </a:solidFill>
-                <a:latin typeface="Arial" pitchFamily="34" charset="0"/>
-                <a:ea typeface="Arial" pitchFamily="34" charset="-122"/>
-                <a:cs typeface="Arial" pitchFamily="34" charset="-120"/>
+                <a:latin typeface="Microsoft YaHei" pitchFamily="34" charset="0"/>
+                <a:ea typeface="Microsoft YaHei" pitchFamily="34" charset="-122"/>
+                <a:cs typeface="Microsoft YaHei" pitchFamily="34" charset="-120"/>
               </a:rPr>
               <a:t>04</a:t>
             </a:r>
@@ -5587,11 +5587,11 @@
                 <a:solidFill>
                   <a:srgbClr val="EDEBE5"/>
                 </a:solidFill>
-                <a:latin typeface="Arial" pitchFamily="34" charset="0"/>
-                <a:ea typeface="Arial" pitchFamily="34" charset="-122"/>
-                <a:cs typeface="Arial" pitchFamily="34" charset="-120"/>
-              </a:rPr>
-              <a:t>Enterprise RBAC</a:t>
+                <a:latin typeface="Microsoft YaHei" pitchFamily="34" charset="0"/>
+                <a:ea typeface="Microsoft YaHei" pitchFamily="34" charset="-122"/>
+                <a:cs typeface="Microsoft YaHei" pitchFamily="34" charset="-120"/>
+              </a:rPr>
+              <a:t>企业级 RBAC</a:t>
             </a:r>
             <a:endParaRPr lang="en-US" sz="1600" dirty="0"/>
           </a:p>
@@ -5626,11 +5626,11 @@
                 <a:solidFill>
                   <a:srgbClr val="9A9E97"/>
                 </a:solidFill>
-                <a:latin typeface="Arial" pitchFamily="34" charset="0"/>
-                <a:ea typeface="Arial" pitchFamily="34" charset="-122"/>
-                <a:cs typeface="Arial" pitchFamily="34" charset="-120"/>
-              </a:rPr>
-              <a:t>Granular roles and approval policies for larger teams.</a:t>
+                <a:latin typeface="Microsoft YaHei" pitchFamily="34" charset="0"/>
+                <a:ea typeface="Microsoft YaHei" pitchFamily="34" charset="-122"/>
+                <a:cs typeface="Microsoft YaHei" pitchFamily="34" charset="-120"/>
+              </a:rPr>
+              <a:t>为大型团队提供细粒度角色与审批策略。</a:t>
             </a:r>
             <a:endParaRPr lang="en-US" sz="1300" dirty="0"/>
           </a:p>
@@ -5717,11 +5717,11 @@
                 <a:solidFill>
                   <a:srgbClr val="EDEBE5"/>
                 </a:solidFill>
-                <a:latin typeface="Arial" pitchFamily="34" charset="0"/>
-                <a:ea typeface="Arial" pitchFamily="34" charset="-122"/>
-                <a:cs typeface="Arial" pitchFamily="34" charset="-120"/>
-              </a:rPr>
-              <a:t>Stop sending blind.</a:t>
+                <a:latin typeface="Microsoft YaHei" pitchFamily="34" charset="0"/>
+                <a:ea typeface="Microsoft YaHei" pitchFamily="34" charset="-122"/>
+                <a:cs typeface="Microsoft YaHei" pitchFamily="34" charset="-120"/>
+              </a:rPr>
+              <a:t>别再盲发。</a:t>
             </a:r>
             <a:endParaRPr lang="en-US" sz="5400" dirty="0"/>
           </a:p>
@@ -5735,8 +5735,8 @@
         </p:nvSpPr>
         <p:spPr>
           <a:xfrm>
-            <a:off x="1828800" y="3840480"/>
-            <a:ext cx="8531352" cy="914400"/>
+            <a:off x="1371600" y="3840480"/>
+            <a:ext cx="9445752" cy="914400"/>
           </a:xfrm>
           <a:prstGeom prst="rect">
             <a:avLst/>
@@ -5756,11 +5756,11 @@
                 <a:solidFill>
                   <a:srgbClr val="9A9E97"/>
                 </a:solidFill>
-                <a:latin typeface="Arial" pitchFamily="34" charset="0"/>
-                <a:ea typeface="Arial" pitchFamily="34" charset="-122"/>
-                <a:cs typeface="Arial" pitchFamily="34" charset="-120"/>
-              </a:rPr>
-              <a:t>FlowGuard checks every cross-border payout before the money moves.</a:t>
+                <a:latin typeface="Microsoft YaHei" pitchFamily="34" charset="0"/>
+                <a:ea typeface="Microsoft YaHei" pitchFamily="34" charset="-122"/>
+                <a:cs typeface="Microsoft YaHei" pitchFamily="34" charset="-120"/>
+              </a:rPr>
+              <a:t>FlowGuard 在每笔跨境付款离账前都先核查。</a:t>
             </a:r>
             <a:endParaRPr lang="en-US" sz="2000" dirty="0"/>
           </a:p>
@@ -5795,11 +5795,11 @@
                 <a:solidFill>
                   <a:srgbClr val="9A9E97"/>
                 </a:solidFill>
-                <a:latin typeface="Arial" pitchFamily="34" charset="0"/>
-                <a:ea typeface="Arial" pitchFamily="34" charset="-122"/>
-                <a:cs typeface="Arial" pitchFamily="34" charset="-120"/>
-              </a:rPr>
-              <a:t>LET'S TALK — LIVE DEMO AVAILABLE NOW.</a:t>
+                <a:latin typeface="Microsoft YaHei" pitchFamily="34" charset="0"/>
+                <a:ea typeface="Microsoft YaHei" pitchFamily="34" charset="-122"/>
+                <a:cs typeface="Microsoft YaHei" pitchFamily="34" charset="-120"/>
+              </a:rPr>
+              <a:t>欢迎联系 —— 现场演示随时可看。</a:t>
             </a:r>
             <a:endParaRPr lang="en-US" sz="1200" dirty="0"/>
           </a:p>

--- a/public/FlowGuard-pitch.pptx
+++ b/public/FlowGuard-pitch.pptx
@@ -2950,7 +2950,7 @@
                 <a:ea typeface="Microsoft YaHei" pitchFamily="34" charset="-122"/>
                 <a:cs typeface="Microsoft YaHei" pitchFamily="34" charset="-120"/>
               </a:rPr>
-              <a:t>以「经办」提交,以「审批」批准。自审在前端与服务端双重硬拦截 —— 真正的职责分离。</a:t>
+              <a:t>以「经办」提交,以「审批」批准,自审前后端双重硬拦截。当前为单账户演示(切身份展示机制),生产为两个独立账户。</a:t>
             </a:r>
             <a:endParaRPr lang="en-US" sz="1300" dirty="0"/>
           </a:p>
